--- a/pitch-deck/pitch_light_mode.pptx
+++ b/pitch-deck/pitch_light_mode.pptx
@@ -109,6 +109,11 @@
       </a:defRPr>
     </a:lvl9pPr>
   </p:defaultTextStyle>
+  <p:extLst>
+    <p:ext uri="{EFAFB233-063F-42B5-8137-9DF3F51BA10A}">
+      <p15:sldGuideLst xmlns:p15="http://schemas.microsoft.com/office/powerpoint/2012/main"/>
+    </p:ext>
+  </p:extLst>
 </p:presentation>
 </file>
 

--- a/pitch-deck/pitch_light_mode.pptx
+++ b/pitch-deck/pitch_light_mode.pptx
@@ -264,7 +264,7 @@
           <a:p>
             <a:fld id="{7C1DADF8-1C91-0740-A86F-D459C0CE5FDC}" type="datetimeFigureOut">
               <a:rPr lang="it-IT" smtClean="0"/>
-              <a:t>19/03/26</a:t>
+              <a:t>20/03/26</a:t>
             </a:fld>
             <a:endParaRPr lang="it-IT"/>
           </a:p>
@@ -462,7 +462,7 @@
           <a:p>
             <a:fld id="{7C1DADF8-1C91-0740-A86F-D459C0CE5FDC}" type="datetimeFigureOut">
               <a:rPr lang="it-IT" smtClean="0"/>
-              <a:t>19/03/26</a:t>
+              <a:t>20/03/26</a:t>
             </a:fld>
             <a:endParaRPr lang="it-IT"/>
           </a:p>
@@ -670,7 +670,7 @@
           <a:p>
             <a:fld id="{7C1DADF8-1C91-0740-A86F-D459C0CE5FDC}" type="datetimeFigureOut">
               <a:rPr lang="it-IT" smtClean="0"/>
-              <a:t>19/03/26</a:t>
+              <a:t>20/03/26</a:t>
             </a:fld>
             <a:endParaRPr lang="it-IT"/>
           </a:p>
@@ -868,7 +868,7 @@
           <a:p>
             <a:fld id="{7C1DADF8-1C91-0740-A86F-D459C0CE5FDC}" type="datetimeFigureOut">
               <a:rPr lang="it-IT" smtClean="0"/>
-              <a:t>19/03/26</a:t>
+              <a:t>20/03/26</a:t>
             </a:fld>
             <a:endParaRPr lang="it-IT"/>
           </a:p>
@@ -1143,7 +1143,7 @@
           <a:p>
             <a:fld id="{7C1DADF8-1C91-0740-A86F-D459C0CE5FDC}" type="datetimeFigureOut">
               <a:rPr lang="it-IT" smtClean="0"/>
-              <a:t>19/03/26</a:t>
+              <a:t>20/03/26</a:t>
             </a:fld>
             <a:endParaRPr lang="it-IT"/>
           </a:p>
@@ -1408,7 +1408,7 @@
           <a:p>
             <a:fld id="{7C1DADF8-1C91-0740-A86F-D459C0CE5FDC}" type="datetimeFigureOut">
               <a:rPr lang="it-IT" smtClean="0"/>
-              <a:t>19/03/26</a:t>
+              <a:t>20/03/26</a:t>
             </a:fld>
             <a:endParaRPr lang="it-IT"/>
           </a:p>
@@ -1820,7 +1820,7 @@
           <a:p>
             <a:fld id="{7C1DADF8-1C91-0740-A86F-D459C0CE5FDC}" type="datetimeFigureOut">
               <a:rPr lang="it-IT" smtClean="0"/>
-              <a:t>19/03/26</a:t>
+              <a:t>20/03/26</a:t>
             </a:fld>
             <a:endParaRPr lang="it-IT"/>
           </a:p>
@@ -1961,7 +1961,7 @@
           <a:p>
             <a:fld id="{7C1DADF8-1C91-0740-A86F-D459C0CE5FDC}" type="datetimeFigureOut">
               <a:rPr lang="it-IT" smtClean="0"/>
-              <a:t>19/03/26</a:t>
+              <a:t>20/03/26</a:t>
             </a:fld>
             <a:endParaRPr lang="it-IT"/>
           </a:p>
@@ -2074,7 +2074,7 @@
           <a:p>
             <a:fld id="{7C1DADF8-1C91-0740-A86F-D459C0CE5FDC}" type="datetimeFigureOut">
               <a:rPr lang="it-IT" smtClean="0"/>
-              <a:t>19/03/26</a:t>
+              <a:t>20/03/26</a:t>
             </a:fld>
             <a:endParaRPr lang="it-IT"/>
           </a:p>
@@ -2385,7 +2385,7 @@
           <a:p>
             <a:fld id="{7C1DADF8-1C91-0740-A86F-D459C0CE5FDC}" type="datetimeFigureOut">
               <a:rPr lang="it-IT" smtClean="0"/>
-              <a:t>19/03/26</a:t>
+              <a:t>20/03/26</a:t>
             </a:fld>
             <a:endParaRPr lang="it-IT"/>
           </a:p>
@@ -2673,7 +2673,7 @@
           <a:p>
             <a:fld id="{7C1DADF8-1C91-0740-A86F-D459C0CE5FDC}" type="datetimeFigureOut">
               <a:rPr lang="it-IT" smtClean="0"/>
-              <a:t>19/03/26</a:t>
+              <a:t>20/03/26</a:t>
             </a:fld>
             <a:endParaRPr lang="it-IT"/>
           </a:p>
@@ -2914,7 +2914,7 @@
           <a:p>
             <a:fld id="{7C1DADF8-1C91-0740-A86F-D459C0CE5FDC}" type="datetimeFigureOut">
               <a:rPr lang="it-IT" smtClean="0"/>
-              <a:t>19/03/26</a:t>
+              <a:t>20/03/26</a:t>
             </a:fld>
             <a:endParaRPr lang="it-IT"/>
           </a:p>
@@ -3881,6 +3881,135 @@
           <a:chExt cx="0" cy="0"/>
         </a:xfrm>
       </p:grpSpPr>
+      <p:sp>
+        <p:nvSpPr>
+          <p:cNvPr id="2" name="CasellaDiTesto 1">
+            <a:extLst>
+              <a:ext uri="{FF2B5EF4-FFF2-40B4-BE49-F238E27FC236}">
+                <a16:creationId xmlns:a16="http://schemas.microsoft.com/office/drawing/2014/main" id="{A64774BA-5E70-8DD7-9253-37F115FEC0AB}"/>
+              </a:ext>
+            </a:extLst>
+          </p:cNvPr>
+          <p:cNvSpPr txBox="1"/>
+          <p:nvPr/>
+        </p:nvSpPr>
+        <p:spPr>
+          <a:xfrm>
+            <a:off x="1773342" y="1142137"/>
+            <a:ext cx="8645315" cy="3416320"/>
+          </a:xfrm>
+          <a:prstGeom prst="rect">
+            <a:avLst/>
+          </a:prstGeom>
+          <a:noFill/>
+        </p:spPr>
+        <p:txBody>
+          <a:bodyPr wrap="none" rtlCol="0">
+            <a:spAutoFit/>
+          </a:bodyPr>
+          <a:lstStyle/>
+          <a:p>
+            <a:r>
+              <a:rPr lang="it-IT" sz="5400" b="1" dirty="0">
+                <a:latin typeface="Calibri" panose="020F0502020204030204" pitchFamily="34" charset="0"/>
+                <a:cs typeface="Calibri" panose="020F0502020204030204" pitchFamily="34" charset="0"/>
+              </a:rPr>
+              <a:t>Thank </a:t>
+            </a:r>
+            <a:r>
+              <a:rPr lang="it-IT" sz="5400" b="1" dirty="0" err="1">
+                <a:latin typeface="Calibri" panose="020F0502020204030204" pitchFamily="34" charset="0"/>
+                <a:cs typeface="Calibri" panose="020F0502020204030204" pitchFamily="34" charset="0"/>
+              </a:rPr>
+              <a:t>you</a:t>
+            </a:r>
+            <a:r>
+              <a:rPr lang="it-IT" sz="5400" b="1" dirty="0">
+                <a:latin typeface="Calibri" panose="020F0502020204030204" pitchFamily="34" charset="0"/>
+                <a:cs typeface="Calibri" panose="020F0502020204030204" pitchFamily="34" charset="0"/>
+              </a:rPr>
+              <a:t> for </a:t>
+            </a:r>
+            <a:r>
+              <a:rPr lang="it-IT" sz="5400" b="1" dirty="0" err="1">
+                <a:latin typeface="Calibri" panose="020F0502020204030204" pitchFamily="34" charset="0"/>
+                <a:cs typeface="Calibri" panose="020F0502020204030204" pitchFamily="34" charset="0"/>
+              </a:rPr>
+              <a:t>your</a:t>
+            </a:r>
+            <a:r>
+              <a:rPr lang="it-IT" sz="5400" b="1" dirty="0">
+                <a:latin typeface="Calibri" panose="020F0502020204030204" pitchFamily="34" charset="0"/>
+                <a:cs typeface="Calibri" panose="020F0502020204030204" pitchFamily="34" charset="0"/>
+              </a:rPr>
+              <a:t> </a:t>
+            </a:r>
+            <a:r>
+              <a:rPr lang="it-IT" sz="5400" b="1" dirty="0" err="1">
+                <a:latin typeface="Calibri" panose="020F0502020204030204" pitchFamily="34" charset="0"/>
+                <a:cs typeface="Calibri" panose="020F0502020204030204" pitchFamily="34" charset="0"/>
+              </a:rPr>
+              <a:t>attention</a:t>
+            </a:r>
+            <a:r>
+              <a:rPr lang="it-IT" sz="5400" b="1" dirty="0">
+                <a:latin typeface="Calibri" panose="020F0502020204030204" pitchFamily="34" charset="0"/>
+                <a:cs typeface="Calibri" panose="020F0502020204030204" pitchFamily="34" charset="0"/>
+              </a:rPr>
+              <a:t>!</a:t>
+            </a:r>
+          </a:p>
+          <a:p>
+            <a:endParaRPr lang="it-IT" sz="5400" b="1" dirty="0">
+              <a:latin typeface="Calibri" panose="020F0502020204030204" pitchFamily="34" charset="0"/>
+              <a:cs typeface="Calibri" panose="020F0502020204030204" pitchFamily="34" charset="0"/>
+            </a:endParaRPr>
+          </a:p>
+          <a:p>
+            <a:endParaRPr lang="it-IT" sz="5400" b="1" dirty="0">
+              <a:latin typeface="Calibri" panose="020F0502020204030204" pitchFamily="34" charset="0"/>
+              <a:cs typeface="Calibri" panose="020F0502020204030204" pitchFamily="34" charset="0"/>
+            </a:endParaRPr>
+          </a:p>
+          <a:p>
+            <a:pPr algn="ctr"/>
+            <a:r>
+              <a:rPr lang="it-IT" sz="5400" b="1" dirty="0"/>
+              <a:t>Q&amp;A</a:t>
+            </a:r>
+          </a:p>
+        </p:txBody>
+      </p:sp>
+      <p:pic>
+        <p:nvPicPr>
+          <p:cNvPr id="3" name="Immagine 2">
+            <a:extLst>
+              <a:ext uri="{FF2B5EF4-FFF2-40B4-BE49-F238E27FC236}">
+                <a16:creationId xmlns:a16="http://schemas.microsoft.com/office/drawing/2014/main" id="{CC5B9B5A-49C4-297E-48E8-0A856B2B4695}"/>
+              </a:ext>
+            </a:extLst>
+          </p:cNvPr>
+          <p:cNvPicPr>
+            <a:picLocks noChangeAspect="1"/>
+          </p:cNvPicPr>
+          <p:nvPr/>
+        </p:nvPicPr>
+        <p:blipFill>
+          <a:blip r:embed="rId2"/>
+          <a:stretch>
+            <a:fillRect/>
+          </a:stretch>
+        </p:blipFill>
+        <p:spPr>
+          <a:xfrm>
+            <a:off x="5416549" y="2247047"/>
+            <a:ext cx="1358900" cy="1409700"/>
+          </a:xfrm>
+          <a:prstGeom prst="rect">
+            <a:avLst/>
+          </a:prstGeom>
+        </p:spPr>
+      </p:pic>
     </p:spTree>
     <p:extLst>
       <p:ext uri="{BB962C8B-B14F-4D97-AF65-F5344CB8AC3E}">
